--- a/docs/presentazione.pptx
+++ b/docs/presentazione.pptx
@@ -57,7 +57,7 @@
       </p:grpSpPr>
       <p:sp>
         <p:nvSpPr>
-          <p:cNvPr id="1212539127" name="Header Placeholder 1"/>
+          <p:cNvPr id="1646682660" name="Header Placeholder 1"/>
           <p:cNvSpPr>
             <a:spLocks noGrp="1"/>
           </p:cNvSpPr>
@@ -91,7 +91,7 @@
       </p:sp>
       <p:sp>
         <p:nvSpPr>
-          <p:cNvPr id="142340206" name="Date Placeholder 2"/>
+          <p:cNvPr id="85327251" name="Date Placeholder 2"/>
           <p:cNvSpPr>
             <a:spLocks noGrp="1"/>
           </p:cNvSpPr>
@@ -129,7 +129,7 @@
       </p:sp>
       <p:sp>
         <p:nvSpPr>
-          <p:cNvPr id="1218173460" name="Footer Placeholder 3"/>
+          <p:cNvPr id="1036161834" name="Footer Placeholder 3"/>
           <p:cNvSpPr>
             <a:spLocks noGrp="1"/>
           </p:cNvSpPr>
@@ -163,7 +163,7 @@
       </p:sp>
       <p:sp>
         <p:nvSpPr>
-          <p:cNvPr id="1064719066" name="Slide Number Placeholder 4"/>
+          <p:cNvPr id="1814498560" name="Slide Number Placeholder 4"/>
           <p:cNvSpPr>
             <a:spLocks noGrp="1"/>
           </p:cNvSpPr>
@@ -229,7 +229,7 @@
       </p:grpSpPr>
       <p:sp>
         <p:nvSpPr>
-          <p:cNvPr id="1664343789" name="Header Placeholder 1"/>
+          <p:cNvPr id="1743550787" name="Header Placeholder 1"/>
           <p:cNvSpPr>
             <a:spLocks noGrp="1"/>
           </p:cNvSpPr>
@@ -263,7 +263,7 @@
       </p:sp>
       <p:sp>
         <p:nvSpPr>
-          <p:cNvPr id="1233248645" name="Date Placeholder 2"/>
+          <p:cNvPr id="148707622" name="Date Placeholder 2"/>
           <p:cNvSpPr>
             <a:spLocks noGrp="1"/>
           </p:cNvSpPr>
@@ -301,7 +301,7 @@
       </p:sp>
       <p:sp>
         <p:nvSpPr>
-          <p:cNvPr id="863995290" name="Notes Placeholder 4"/>
+          <p:cNvPr id="958928099" name="Notes Placeholder 4"/>
           <p:cNvSpPr>
             <a:spLocks noGrp="1"/>
           </p:cNvSpPr>
@@ -375,7 +375,7 @@
       </p:sp>
       <p:sp>
         <p:nvSpPr>
-          <p:cNvPr id="312335786" name="Footer Placeholder 3"/>
+          <p:cNvPr id="1593284223" name="Footer Placeholder 3"/>
           <p:cNvSpPr>
             <a:spLocks noGrp="1"/>
           </p:cNvSpPr>
@@ -409,7 +409,7 @@
       </p:sp>
       <p:sp>
         <p:nvSpPr>
-          <p:cNvPr id="1505114884" name="Slide Image Placeholder 3"/>
+          <p:cNvPr id="1806713260" name="Slide Image Placeholder 3"/>
           <p:cNvSpPr>
             <a:spLocks noGrp="1"/>
           </p:cNvSpPr>
@@ -444,7 +444,7 @@
       </p:sp>
       <p:sp>
         <p:nvSpPr>
-          <p:cNvPr id="1824453752" name="Slide Number Placeholder 4"/>
+          <p:cNvPr id="918157542" name="Slide Number Placeholder 4"/>
           <p:cNvSpPr>
             <a:spLocks noGrp="1"/>
           </p:cNvSpPr>
@@ -597,7 +597,7 @@
       </p:grpSpPr>
       <p:sp>
         <p:nvSpPr>
-          <p:cNvPr id="736399415" name="Slide Image Placeholder 3"/>
+          <p:cNvPr id="2074248864" name="Slide Image Placeholder 3"/>
           <p:cNvSpPr>
             <a:spLocks noGrp="1"/>
           </p:cNvSpPr>
@@ -628,7 +628,7 @@
       </p:sp>
       <p:sp>
         <p:nvSpPr>
-          <p:cNvPr id="451090934" name="Notes Placeholder 4"/>
+          <p:cNvPr id="2126004527" name="Notes Placeholder 4"/>
           <p:cNvSpPr>
             <a:spLocks noGrp="1"/>
           </p:cNvSpPr>
@@ -654,7 +654,7 @@
       </p:sp>
       <p:sp>
         <p:nvSpPr>
-          <p:cNvPr id="175642498" name="Slide Number Placeholder 4"/>
+          <p:cNvPr id="1808056935" name="Slide Number Placeholder 4"/>
           <p:cNvSpPr>
             <a:spLocks noGrp="1"/>
           </p:cNvSpPr>
@@ -709,7 +709,7 @@
       </p:grpSpPr>
       <p:sp>
         <p:nvSpPr>
-          <p:cNvPr id="451532604" name="Slide Image Placeholder 3"/>
+          <p:cNvPr id="942864189" name="Slide Image Placeholder 3"/>
           <p:cNvSpPr>
             <a:spLocks noGrp="1"/>
           </p:cNvSpPr>
@@ -740,7 +740,7 @@
       </p:sp>
       <p:sp>
         <p:nvSpPr>
-          <p:cNvPr id="506138800" name="Notes Placeholder 4"/>
+          <p:cNvPr id="1116312046" name="Notes Placeholder 4"/>
           <p:cNvSpPr>
             <a:spLocks noGrp="1"/>
           </p:cNvSpPr>
@@ -766,7 +766,7 @@
       </p:sp>
       <p:sp>
         <p:nvSpPr>
-          <p:cNvPr id="1476650854" name="Slide Number Placeholder 4"/>
+          <p:cNvPr id="1107537933" name="Slide Number Placeholder 4"/>
           <p:cNvSpPr>
             <a:spLocks noGrp="1"/>
           </p:cNvSpPr>
@@ -821,7 +821,7 @@
       </p:grpSpPr>
       <p:sp>
         <p:nvSpPr>
-          <p:cNvPr id="1856122731" name="Slide Image Placeholder 3"/>
+          <p:cNvPr id="66073657" name="Slide Image Placeholder 3"/>
           <p:cNvSpPr>
             <a:spLocks noGrp="1"/>
           </p:cNvSpPr>
@@ -852,7 +852,7 @@
       </p:sp>
       <p:sp>
         <p:nvSpPr>
-          <p:cNvPr id="2075046518" name="Notes Placeholder 4"/>
+          <p:cNvPr id="565681748" name="Notes Placeholder 4"/>
           <p:cNvSpPr>
             <a:spLocks noGrp="1"/>
           </p:cNvSpPr>
@@ -878,7 +878,7 @@
       </p:sp>
       <p:sp>
         <p:nvSpPr>
-          <p:cNvPr id="300493580" name="Slide Number Placeholder 4"/>
+          <p:cNvPr id="2003794595" name="Slide Number Placeholder 4"/>
           <p:cNvSpPr>
             <a:spLocks noGrp="1"/>
           </p:cNvSpPr>
@@ -933,7 +933,7 @@
       </p:grpSpPr>
       <p:sp>
         <p:nvSpPr>
-          <p:cNvPr id="1832327252" name="Slide Image Placeholder 3"/>
+          <p:cNvPr id="224907466" name="Slide Image Placeholder 3"/>
           <p:cNvSpPr>
             <a:spLocks noGrp="1"/>
           </p:cNvSpPr>
@@ -964,7 +964,7 @@
       </p:sp>
       <p:sp>
         <p:nvSpPr>
-          <p:cNvPr id="1470217808" name="Notes Placeholder 4"/>
+          <p:cNvPr id="660446938" name="Notes Placeholder 4"/>
           <p:cNvSpPr>
             <a:spLocks noGrp="1"/>
           </p:cNvSpPr>
@@ -990,7 +990,7 @@
       </p:sp>
       <p:sp>
         <p:nvSpPr>
-          <p:cNvPr id="697262782" name="Slide Number Placeholder 4"/>
+          <p:cNvPr id="1172631355" name="Slide Number Placeholder 4"/>
           <p:cNvSpPr>
             <a:spLocks noGrp="1"/>
           </p:cNvSpPr>
@@ -1045,7 +1045,7 @@
       </p:grpSpPr>
       <p:sp>
         <p:nvSpPr>
-          <p:cNvPr id="1440835737" name="Slide Image Placeholder 3"/>
+          <p:cNvPr id="1567903963" name="Slide Image Placeholder 3"/>
           <p:cNvSpPr>
             <a:spLocks noGrp="1"/>
           </p:cNvSpPr>
@@ -1076,7 +1076,7 @@
       </p:sp>
       <p:sp>
         <p:nvSpPr>
-          <p:cNvPr id="232168786" name="Notes Placeholder 4"/>
+          <p:cNvPr id="1613631853" name="Notes Placeholder 4"/>
           <p:cNvSpPr>
             <a:spLocks noGrp="1"/>
           </p:cNvSpPr>
@@ -1102,7 +1102,7 @@
       </p:sp>
       <p:sp>
         <p:nvSpPr>
-          <p:cNvPr id="1298415730" name="Slide Number Placeholder 4"/>
+          <p:cNvPr id="1613395570" name="Slide Number Placeholder 4"/>
           <p:cNvSpPr>
             <a:spLocks noGrp="1"/>
           </p:cNvSpPr>
@@ -1157,7 +1157,7 @@
       </p:grpSpPr>
       <p:sp>
         <p:nvSpPr>
-          <p:cNvPr id="1590395961" name="Slide Image Placeholder 3"/>
+          <p:cNvPr id="1192334082" name="Slide Image Placeholder 3"/>
           <p:cNvSpPr>
             <a:spLocks noGrp="1"/>
           </p:cNvSpPr>
@@ -1188,7 +1188,7 @@
       </p:sp>
       <p:sp>
         <p:nvSpPr>
-          <p:cNvPr id="58107792" name="Notes Placeholder 4"/>
+          <p:cNvPr id="580919652" name="Notes Placeholder 4"/>
           <p:cNvSpPr>
             <a:spLocks noGrp="1"/>
           </p:cNvSpPr>
@@ -1214,7 +1214,7 @@
       </p:sp>
       <p:sp>
         <p:nvSpPr>
-          <p:cNvPr id="691755443" name="Slide Number Placeholder 4"/>
+          <p:cNvPr id="1191667791" name="Slide Number Placeholder 4"/>
           <p:cNvSpPr>
             <a:spLocks noGrp="1"/>
           </p:cNvSpPr>
@@ -1269,7 +1269,7 @@
       </p:grpSpPr>
       <p:sp>
         <p:nvSpPr>
-          <p:cNvPr id="23806726" name="Slide Image Placeholder 3"/>
+          <p:cNvPr id="801449030" name="Slide Image Placeholder 3"/>
           <p:cNvSpPr>
             <a:spLocks noGrp="1"/>
           </p:cNvSpPr>
@@ -1300,7 +1300,7 @@
       </p:sp>
       <p:sp>
         <p:nvSpPr>
-          <p:cNvPr id="1829048171" name="Notes Placeholder 4"/>
+          <p:cNvPr id="110060544" name="Notes Placeholder 4"/>
           <p:cNvSpPr>
             <a:spLocks noGrp="1"/>
           </p:cNvSpPr>
@@ -1326,7 +1326,7 @@
       </p:sp>
       <p:sp>
         <p:nvSpPr>
-          <p:cNvPr id="518852934" name="Slide Number Placeholder 4"/>
+          <p:cNvPr id="388244429" name="Slide Number Placeholder 4"/>
           <p:cNvSpPr>
             <a:spLocks noGrp="1"/>
           </p:cNvSpPr>
@@ -1381,7 +1381,7 @@
       </p:grpSpPr>
       <p:sp>
         <p:nvSpPr>
-          <p:cNvPr id="1887000032" name="Slide Image Placeholder 3"/>
+          <p:cNvPr id="1863851639" name="Slide Image Placeholder 3"/>
           <p:cNvSpPr>
             <a:spLocks noGrp="1"/>
           </p:cNvSpPr>
@@ -1412,7 +1412,7 @@
       </p:sp>
       <p:sp>
         <p:nvSpPr>
-          <p:cNvPr id="1649155750" name="Notes Placeholder 4"/>
+          <p:cNvPr id="999154291" name="Notes Placeholder 4"/>
           <p:cNvSpPr>
             <a:spLocks noGrp="1"/>
           </p:cNvSpPr>
@@ -1438,7 +1438,7 @@
       </p:sp>
       <p:sp>
         <p:nvSpPr>
-          <p:cNvPr id="1831148198" name="Slide Number Placeholder 4"/>
+          <p:cNvPr id="1656163392" name="Slide Number Placeholder 4"/>
           <p:cNvSpPr>
             <a:spLocks noGrp="1"/>
           </p:cNvSpPr>
@@ -1493,7 +1493,7 @@
       </p:grpSpPr>
       <p:sp>
         <p:nvSpPr>
-          <p:cNvPr id="505035859" name="Slide Image Placeholder 3"/>
+          <p:cNvPr id="811974447" name="Slide Image Placeholder 3"/>
           <p:cNvSpPr>
             <a:spLocks noGrp="1"/>
           </p:cNvSpPr>
@@ -1524,7 +1524,7 @@
       </p:sp>
       <p:sp>
         <p:nvSpPr>
-          <p:cNvPr id="912353010" name="Notes Placeholder 4"/>
+          <p:cNvPr id="1691150204" name="Notes Placeholder 4"/>
           <p:cNvSpPr>
             <a:spLocks noGrp="1"/>
           </p:cNvSpPr>
@@ -1550,7 +1550,7 @@
       </p:sp>
       <p:sp>
         <p:nvSpPr>
-          <p:cNvPr id="382529180" name="Slide Number Placeholder 4"/>
+          <p:cNvPr id="1168454543" name="Slide Number Placeholder 4"/>
           <p:cNvSpPr>
             <a:spLocks noGrp="1"/>
           </p:cNvSpPr>
@@ -1605,7 +1605,7 @@
       </p:grpSpPr>
       <p:sp>
         <p:nvSpPr>
-          <p:cNvPr id="1195840479" name="Slide Image Placeholder 3"/>
+          <p:cNvPr id="162538789" name="Slide Image Placeholder 3"/>
           <p:cNvSpPr>
             <a:spLocks noGrp="1"/>
           </p:cNvSpPr>
@@ -1636,7 +1636,7 @@
       </p:sp>
       <p:sp>
         <p:nvSpPr>
-          <p:cNvPr id="467829452" name="Notes Placeholder 4"/>
+          <p:cNvPr id="1120851801" name="Notes Placeholder 4"/>
           <p:cNvSpPr>
             <a:spLocks noGrp="1"/>
           </p:cNvSpPr>
@@ -1662,7 +1662,7 @@
       </p:sp>
       <p:sp>
         <p:nvSpPr>
-          <p:cNvPr id="665325453" name="Slide Number Placeholder 4"/>
+          <p:cNvPr id="290978253" name="Slide Number Placeholder 4"/>
           <p:cNvSpPr>
             <a:spLocks noGrp="1"/>
           </p:cNvSpPr>
@@ -1717,7 +1717,7 @@
       </p:grpSpPr>
       <p:sp>
         <p:nvSpPr>
-          <p:cNvPr id="1259292543" name="Slide Image Placeholder 3"/>
+          <p:cNvPr id="110464062" name="Slide Image Placeholder 3"/>
           <p:cNvSpPr>
             <a:spLocks noGrp="1"/>
           </p:cNvSpPr>
@@ -1748,7 +1748,7 @@
       </p:sp>
       <p:sp>
         <p:nvSpPr>
-          <p:cNvPr id="1720035019" name="Notes Placeholder 4"/>
+          <p:cNvPr id="1054002645" name="Notes Placeholder 4"/>
           <p:cNvSpPr>
             <a:spLocks noGrp="1"/>
           </p:cNvSpPr>
@@ -1774,7 +1774,7 @@
       </p:sp>
       <p:sp>
         <p:nvSpPr>
-          <p:cNvPr id="1944400297" name="Slide Number Placeholder 4"/>
+          <p:cNvPr id="1264246167" name="Slide Number Placeholder 4"/>
           <p:cNvSpPr>
             <a:spLocks noGrp="1"/>
           </p:cNvSpPr>
@@ -1829,7 +1829,7 @@
       </p:grpSpPr>
       <p:sp>
         <p:nvSpPr>
-          <p:cNvPr id="1679345870" name="Holder 2"/>
+          <p:cNvPr id="1196667376" name="Holder 2"/>
           <p:cNvSpPr>
             <a:spLocks noGrp="1"/>
           </p:cNvSpPr>
@@ -1871,7 +1871,7 @@
       </p:sp>
       <p:sp>
         <p:nvSpPr>
-          <p:cNvPr id="1812608626" name="Holder 3"/>
+          <p:cNvPr id="1798436667" name="Holder 3"/>
           <p:cNvSpPr>
             <a:spLocks noGrp="1"/>
           </p:cNvSpPr>
@@ -1911,7 +1911,7 @@
       </p:sp>
       <p:sp>
         <p:nvSpPr>
-          <p:cNvPr id="1758897318" name="Holder 4"/>
+          <p:cNvPr id="1242947466" name="Holder 4"/>
           <p:cNvSpPr>
             <a:spLocks noGrp="1"/>
           </p:cNvSpPr>
@@ -1943,7 +1943,7 @@
       </p:sp>
       <p:sp>
         <p:nvSpPr>
-          <p:cNvPr id="1131173134" name="Holder 5"/>
+          <p:cNvPr id="1838215632" name="Holder 5"/>
           <p:cNvSpPr>
             <a:spLocks noGrp="1"/>
           </p:cNvSpPr>
@@ -1979,7 +1979,7 @@
       </p:sp>
       <p:sp>
         <p:nvSpPr>
-          <p:cNvPr id="101382996" name="Holder 6"/>
+          <p:cNvPr id="1217339227" name="Holder 6"/>
           <p:cNvSpPr>
             <a:spLocks noGrp="1"/>
           </p:cNvSpPr>
@@ -2047,7 +2047,7 @@
       </p:grpSpPr>
       <p:sp>
         <p:nvSpPr>
-          <p:cNvPr id="1584227898" name="bg object 16"/>
+          <p:cNvPr id="225209189" name="bg object 16"/>
           <p:cNvSpPr/>
           <p:nvPr/>
         </p:nvSpPr>
@@ -2092,7 +2092,7 @@
       </p:sp>
       <p:sp>
         <p:nvSpPr>
-          <p:cNvPr id="1704532922" name="bg object 17"/>
+          <p:cNvPr id="1436394647" name="bg object 17"/>
           <p:cNvSpPr/>
           <p:nvPr/>
         </p:nvSpPr>
@@ -2145,7 +2145,7 @@
       </p:sp>
       <p:sp>
         <p:nvSpPr>
-          <p:cNvPr id="804184277" name="bg object 18"/>
+          <p:cNvPr id="1163209195" name="bg object 18"/>
           <p:cNvSpPr/>
           <p:nvPr/>
         </p:nvSpPr>
@@ -2246,7 +2246,7 @@
       </p:sp>
       <p:sp>
         <p:nvSpPr>
-          <p:cNvPr id="1702124130" name="bg object 19"/>
+          <p:cNvPr id="22191837" name="bg object 19"/>
           <p:cNvSpPr/>
           <p:nvPr/>
         </p:nvSpPr>
@@ -2431,7 +2431,7 @@
       </p:sp>
       <p:pic>
         <p:nvPicPr>
-          <p:cNvPr id="361833289" name="bg object 20"/>
+          <p:cNvPr id="2051687058" name="bg object 20"/>
           <p:cNvPicPr/>
           <p:nvPr/>
         </p:nvPicPr>
@@ -2451,7 +2451,7 @@
       </p:pic>
       <p:sp>
         <p:nvSpPr>
-          <p:cNvPr id="999542688" name="bg object 21"/>
+          <p:cNvPr id="2099898563" name="bg object 21"/>
           <p:cNvSpPr/>
           <p:nvPr/>
         </p:nvSpPr>
@@ -2552,7 +2552,7 @@
       </p:sp>
       <p:sp>
         <p:nvSpPr>
-          <p:cNvPr id="1977911734" name="bg object 22"/>
+          <p:cNvPr id="1619824483" name="bg object 22"/>
           <p:cNvSpPr/>
           <p:nvPr/>
         </p:nvSpPr>
@@ -2734,7 +2734,7 @@
       </p:sp>
       <p:pic>
         <p:nvPicPr>
-          <p:cNvPr id="1664799238" name="bg object 23"/>
+          <p:cNvPr id="78975739" name="bg object 23"/>
           <p:cNvPicPr/>
           <p:nvPr/>
         </p:nvPicPr>
@@ -2754,7 +2754,7 @@
       </p:pic>
       <p:sp>
         <p:nvSpPr>
-          <p:cNvPr id="1768237510" name="bg object 24"/>
+          <p:cNvPr id="977907768" name="bg object 24"/>
           <p:cNvSpPr/>
           <p:nvPr/>
         </p:nvSpPr>
@@ -2799,7 +2799,7 @@
       </p:sp>
       <p:sp>
         <p:nvSpPr>
-          <p:cNvPr id="1230382872" name="bg object 25"/>
+          <p:cNvPr id="874467916" name="bg object 25"/>
           <p:cNvSpPr/>
           <p:nvPr/>
         </p:nvSpPr>
@@ -2960,7 +2960,7 @@
       </p:sp>
       <p:sp>
         <p:nvSpPr>
-          <p:cNvPr id="891155642" name="bg object 26"/>
+          <p:cNvPr id="1471165234" name="bg object 26"/>
           <p:cNvSpPr/>
           <p:nvPr/>
         </p:nvSpPr>
@@ -3238,7 +3238,7 @@
       </p:sp>
       <p:sp>
         <p:nvSpPr>
-          <p:cNvPr id="1845927514" name="bg object 27"/>
+          <p:cNvPr id="1444847561" name="bg object 27"/>
           <p:cNvSpPr/>
           <p:nvPr/>
         </p:nvSpPr>
@@ -3363,7 +3363,7 @@
       </p:sp>
       <p:sp>
         <p:nvSpPr>
-          <p:cNvPr id="1331364128" name="bg object 28"/>
+          <p:cNvPr id="741455888" name="bg object 28"/>
           <p:cNvSpPr/>
           <p:nvPr/>
         </p:nvSpPr>
@@ -3608,7 +3608,7 @@
       </p:sp>
       <p:sp>
         <p:nvSpPr>
-          <p:cNvPr id="849478407" name="bg object 29"/>
+          <p:cNvPr id="1996149041" name="bg object 29"/>
           <p:cNvSpPr/>
           <p:nvPr/>
         </p:nvSpPr>
@@ -3709,7 +3709,7 @@
       </p:sp>
       <p:sp>
         <p:nvSpPr>
-          <p:cNvPr id="871988115" name="bg object 30"/>
+          <p:cNvPr id="1149924603" name="bg object 30"/>
           <p:cNvSpPr/>
           <p:nvPr/>
         </p:nvSpPr>
@@ -3894,7 +3894,7 @@
       </p:sp>
       <p:sp>
         <p:nvSpPr>
-          <p:cNvPr id="1649700536" name="bg object 31"/>
+          <p:cNvPr id="2017671831" name="bg object 31"/>
           <p:cNvSpPr/>
           <p:nvPr/>
         </p:nvSpPr>
@@ -3995,7 +3995,7 @@
       </p:sp>
       <p:sp>
         <p:nvSpPr>
-          <p:cNvPr id="1090131590" name="bg object 32"/>
+          <p:cNvPr id="710778040" name="bg object 32"/>
           <p:cNvSpPr/>
           <p:nvPr/>
         </p:nvSpPr>
@@ -4180,7 +4180,7 @@
       </p:sp>
       <p:pic>
         <p:nvPicPr>
-          <p:cNvPr id="1152584782" name="bg object 33"/>
+          <p:cNvPr id="580654761" name="bg object 33"/>
           <p:cNvPicPr/>
           <p:nvPr/>
         </p:nvPicPr>
@@ -4200,7 +4200,7 @@
       </p:pic>
       <p:pic>
         <p:nvPicPr>
-          <p:cNvPr id="850694431" name="bg object 34"/>
+          <p:cNvPr id="59059991" name="bg object 34"/>
           <p:cNvPicPr/>
           <p:nvPr/>
         </p:nvPicPr>
@@ -4220,7 +4220,7 @@
       </p:pic>
       <p:sp>
         <p:nvSpPr>
-          <p:cNvPr id="562528149" name="bg object 35"/>
+          <p:cNvPr id="1228466091" name="bg object 35"/>
           <p:cNvSpPr/>
           <p:nvPr/>
         </p:nvSpPr>
@@ -4265,7 +4265,7 @@
       </p:sp>
       <p:sp>
         <p:nvSpPr>
-          <p:cNvPr id="582040216" name="bg object 36"/>
+          <p:cNvPr id="1821292013" name="bg object 36"/>
           <p:cNvSpPr/>
           <p:nvPr/>
         </p:nvSpPr>
@@ -4318,7 +4318,7 @@
       </p:sp>
       <p:sp>
         <p:nvSpPr>
-          <p:cNvPr id="1785411329" name="Holder 2"/>
+          <p:cNvPr id="1849521140" name="Holder 2"/>
           <p:cNvSpPr>
             <a:spLocks noGrp="1"/>
           </p:cNvSpPr>
@@ -4350,7 +4350,7 @@
       </p:sp>
       <p:sp>
         <p:nvSpPr>
-          <p:cNvPr id="1897410736" name="Holder 3"/>
+          <p:cNvPr id="1779135595" name="Holder 3"/>
           <p:cNvSpPr>
             <a:spLocks noGrp="1"/>
           </p:cNvSpPr>
@@ -4380,7 +4380,7 @@
       </p:sp>
       <p:sp>
         <p:nvSpPr>
-          <p:cNvPr id="489784483" name="Holder 4"/>
+          <p:cNvPr id="1006588368" name="Holder 4"/>
           <p:cNvSpPr>
             <a:spLocks noGrp="1"/>
           </p:cNvSpPr>
@@ -4412,7 +4412,7 @@
       </p:sp>
       <p:sp>
         <p:nvSpPr>
-          <p:cNvPr id="1010412222" name="Holder 5"/>
+          <p:cNvPr id="107998799" name="Holder 5"/>
           <p:cNvSpPr>
             <a:spLocks noGrp="1"/>
           </p:cNvSpPr>
@@ -4448,7 +4448,7 @@
       </p:sp>
       <p:sp>
         <p:nvSpPr>
-          <p:cNvPr id="2091270780" name="Holder 6"/>
+          <p:cNvPr id="1103131733" name="Holder 6"/>
           <p:cNvSpPr>
             <a:spLocks noGrp="1"/>
           </p:cNvSpPr>
@@ -4516,7 +4516,7 @@
       </p:grpSpPr>
       <p:sp>
         <p:nvSpPr>
-          <p:cNvPr id="1154936065" name="bg object 16"/>
+          <p:cNvPr id="526667599" name="bg object 16"/>
           <p:cNvSpPr/>
           <p:nvPr/>
         </p:nvSpPr>
@@ -4561,7 +4561,7 @@
       </p:sp>
       <p:sp>
         <p:nvSpPr>
-          <p:cNvPr id="1292265659" name="bg object 17"/>
+          <p:cNvPr id="1860133081" name="bg object 17"/>
           <p:cNvSpPr/>
           <p:nvPr/>
         </p:nvSpPr>
@@ -4614,7 +4614,7 @@
       </p:sp>
       <p:sp>
         <p:nvSpPr>
-          <p:cNvPr id="1055370367" name="bg object 18"/>
+          <p:cNvPr id="1075466175" name="bg object 18"/>
           <p:cNvSpPr/>
           <p:nvPr/>
         </p:nvSpPr>
@@ -4715,7 +4715,7 @@
       </p:sp>
       <p:sp>
         <p:nvSpPr>
-          <p:cNvPr id="877835538" name="bg object 19"/>
+          <p:cNvPr id="1035691826" name="bg object 19"/>
           <p:cNvSpPr/>
           <p:nvPr/>
         </p:nvSpPr>
@@ -4900,7 +4900,7 @@
       </p:sp>
       <p:pic>
         <p:nvPicPr>
-          <p:cNvPr id="731044955" name="bg object 20"/>
+          <p:cNvPr id="483135421" name="bg object 20"/>
           <p:cNvPicPr/>
           <p:nvPr/>
         </p:nvPicPr>
@@ -4920,7 +4920,7 @@
       </p:pic>
       <p:sp>
         <p:nvSpPr>
-          <p:cNvPr id="1491643036" name="bg object 21"/>
+          <p:cNvPr id="615553841" name="bg object 21"/>
           <p:cNvSpPr/>
           <p:nvPr/>
         </p:nvSpPr>
@@ -5021,7 +5021,7 @@
       </p:sp>
       <p:sp>
         <p:nvSpPr>
-          <p:cNvPr id="2902897" name="bg object 22"/>
+          <p:cNvPr id="1640025967" name="bg object 22"/>
           <p:cNvSpPr/>
           <p:nvPr/>
         </p:nvSpPr>
@@ -5203,7 +5203,7 @@
       </p:sp>
       <p:pic>
         <p:nvPicPr>
-          <p:cNvPr id="231966966" name="bg object 23"/>
+          <p:cNvPr id="1328276290" name="bg object 23"/>
           <p:cNvPicPr/>
           <p:nvPr/>
         </p:nvPicPr>
@@ -5223,7 +5223,7 @@
       </p:pic>
       <p:sp>
         <p:nvSpPr>
-          <p:cNvPr id="704685059" name="bg object 24"/>
+          <p:cNvPr id="1592038475" name="bg object 24"/>
           <p:cNvSpPr/>
           <p:nvPr/>
         </p:nvSpPr>
@@ -5268,7 +5268,7 @@
       </p:sp>
       <p:sp>
         <p:nvSpPr>
-          <p:cNvPr id="63377783" name="bg object 25"/>
+          <p:cNvPr id="789517440" name="bg object 25"/>
           <p:cNvSpPr/>
           <p:nvPr/>
         </p:nvSpPr>
@@ -5429,7 +5429,7 @@
       </p:sp>
       <p:sp>
         <p:nvSpPr>
-          <p:cNvPr id="677316503" name="bg object 26"/>
+          <p:cNvPr id="37538921" name="bg object 26"/>
           <p:cNvSpPr/>
           <p:nvPr/>
         </p:nvSpPr>
@@ -5707,7 +5707,7 @@
       </p:sp>
       <p:sp>
         <p:nvSpPr>
-          <p:cNvPr id="1883786712" name="bg object 27"/>
+          <p:cNvPr id="1073007838" name="bg object 27"/>
           <p:cNvSpPr/>
           <p:nvPr/>
         </p:nvSpPr>
@@ -5832,7 +5832,7 @@
       </p:sp>
       <p:sp>
         <p:nvSpPr>
-          <p:cNvPr id="1549035538" name="bg object 28"/>
+          <p:cNvPr id="1215843726" name="bg object 28"/>
           <p:cNvSpPr/>
           <p:nvPr/>
         </p:nvSpPr>
@@ -6077,7 +6077,7 @@
       </p:sp>
       <p:sp>
         <p:nvSpPr>
-          <p:cNvPr id="2075424014" name="bg object 29"/>
+          <p:cNvPr id="533551574" name="bg object 29"/>
           <p:cNvSpPr/>
           <p:nvPr/>
         </p:nvSpPr>
@@ -6178,7 +6178,7 @@
       </p:sp>
       <p:sp>
         <p:nvSpPr>
-          <p:cNvPr id="1807860884" name="bg object 30"/>
+          <p:cNvPr id="214908490" name="bg object 30"/>
           <p:cNvSpPr/>
           <p:nvPr/>
         </p:nvSpPr>
@@ -6363,7 +6363,7 @@
       </p:sp>
       <p:sp>
         <p:nvSpPr>
-          <p:cNvPr id="1870805948" name="bg object 31"/>
+          <p:cNvPr id="1173144888" name="bg object 31"/>
           <p:cNvSpPr/>
           <p:nvPr/>
         </p:nvSpPr>
@@ -6464,7 +6464,7 @@
       </p:sp>
       <p:sp>
         <p:nvSpPr>
-          <p:cNvPr id="193299441" name="bg object 32"/>
+          <p:cNvPr id="1867828184" name="bg object 32"/>
           <p:cNvSpPr/>
           <p:nvPr/>
         </p:nvSpPr>
@@ -6649,7 +6649,7 @@
       </p:sp>
       <p:pic>
         <p:nvPicPr>
-          <p:cNvPr id="799361911" name="bg object 33"/>
+          <p:cNvPr id="1237791312" name="bg object 33"/>
           <p:cNvPicPr/>
           <p:nvPr/>
         </p:nvPicPr>
@@ -6669,7 +6669,7 @@
       </p:pic>
       <p:pic>
         <p:nvPicPr>
-          <p:cNvPr id="1999859638" name="bg object 34"/>
+          <p:cNvPr id="1144477961" name="bg object 34"/>
           <p:cNvPicPr/>
           <p:nvPr/>
         </p:nvPicPr>
@@ -6689,7 +6689,7 @@
       </p:pic>
       <p:sp>
         <p:nvSpPr>
-          <p:cNvPr id="1538253427" name="bg object 35"/>
+          <p:cNvPr id="1791951875" name="bg object 35"/>
           <p:cNvSpPr/>
           <p:nvPr/>
         </p:nvSpPr>
@@ -6734,7 +6734,7 @@
       </p:sp>
       <p:sp>
         <p:nvSpPr>
-          <p:cNvPr id="764110481" name="bg object 36"/>
+          <p:cNvPr id="1386742176" name="bg object 36"/>
           <p:cNvSpPr/>
           <p:nvPr/>
         </p:nvSpPr>
@@ -6787,7 +6787,7 @@
       </p:sp>
       <p:sp>
         <p:nvSpPr>
-          <p:cNvPr id="45619241" name="Holder 2"/>
+          <p:cNvPr id="1384784137" name="Holder 2"/>
           <p:cNvSpPr>
             <a:spLocks noGrp="1"/>
           </p:cNvSpPr>
@@ -6819,7 +6819,7 @@
       </p:sp>
       <p:sp>
         <p:nvSpPr>
-          <p:cNvPr id="171649768" name="Holder 3"/>
+          <p:cNvPr id="1692089836" name="Holder 3"/>
           <p:cNvSpPr>
             <a:spLocks noGrp="1"/>
           </p:cNvSpPr>
@@ -6855,7 +6855,7 @@
       </p:sp>
       <p:sp>
         <p:nvSpPr>
-          <p:cNvPr id="1119574204" name="Holder 4"/>
+          <p:cNvPr id="1760099433" name="Holder 4"/>
           <p:cNvSpPr>
             <a:spLocks noGrp="1"/>
           </p:cNvSpPr>
@@ -6891,7 +6891,7 @@
       </p:sp>
       <p:sp>
         <p:nvSpPr>
-          <p:cNvPr id="625206172" name="Holder 5"/>
+          <p:cNvPr id="201171458" name="Holder 5"/>
           <p:cNvSpPr>
             <a:spLocks noGrp="1"/>
           </p:cNvSpPr>
@@ -6923,7 +6923,7 @@
       </p:sp>
       <p:sp>
         <p:nvSpPr>
-          <p:cNvPr id="424887168" name="Holder 6"/>
+          <p:cNvPr id="1745154682" name="Holder 6"/>
           <p:cNvSpPr>
             <a:spLocks noGrp="1"/>
           </p:cNvSpPr>
@@ -6959,7 +6959,7 @@
       </p:sp>
       <p:sp>
         <p:nvSpPr>
-          <p:cNvPr id="761635864" name="Holder 7"/>
+          <p:cNvPr id="51976422" name="Holder 7"/>
           <p:cNvSpPr>
             <a:spLocks noGrp="1"/>
           </p:cNvSpPr>
@@ -7020,7 +7020,7 @@
       </p:grpSpPr>
       <p:sp>
         <p:nvSpPr>
-          <p:cNvPr id="1950047872" name="Holder 2"/>
+          <p:cNvPr id="946893037" name="Holder 2"/>
           <p:cNvSpPr>
             <a:spLocks noGrp="1"/>
           </p:cNvSpPr>
@@ -7052,7 +7052,7 @@
       </p:sp>
       <p:sp>
         <p:nvSpPr>
-          <p:cNvPr id="1314473430" name="Holder 3"/>
+          <p:cNvPr id="1890268677" name="Holder 3"/>
           <p:cNvSpPr>
             <a:spLocks noGrp="1"/>
           </p:cNvSpPr>
@@ -7084,7 +7084,7 @@
       </p:sp>
       <p:sp>
         <p:nvSpPr>
-          <p:cNvPr id="495736293" name="Holder 4"/>
+          <p:cNvPr id="369603306" name="Holder 4"/>
           <p:cNvSpPr>
             <a:spLocks noGrp="1"/>
           </p:cNvSpPr>
@@ -7120,7 +7120,7 @@
       </p:sp>
       <p:sp>
         <p:nvSpPr>
-          <p:cNvPr id="737451596" name="Holder 5"/>
+          <p:cNvPr id="172304230" name="Holder 5"/>
           <p:cNvSpPr>
             <a:spLocks noGrp="1"/>
           </p:cNvSpPr>
@@ -7188,7 +7188,7 @@
       </p:grpSpPr>
       <p:sp>
         <p:nvSpPr>
-          <p:cNvPr id="236951864" name="bg object 16"/>
+          <p:cNvPr id="299404115" name="bg object 16"/>
           <p:cNvSpPr/>
           <p:nvPr/>
         </p:nvSpPr>
@@ -7249,7 +7249,7 @@
       </p:sp>
       <p:sp>
         <p:nvSpPr>
-          <p:cNvPr id="2131981337" name="bg object 17"/>
+          <p:cNvPr id="1221013780" name="bg object 17"/>
           <p:cNvSpPr/>
           <p:nvPr/>
         </p:nvSpPr>
@@ -7410,7 +7410,7 @@
       </p:sp>
       <p:sp>
         <p:nvSpPr>
-          <p:cNvPr id="1358678294" name="bg object 18"/>
+          <p:cNvPr id="1362105313" name="bg object 18"/>
           <p:cNvSpPr/>
           <p:nvPr/>
         </p:nvSpPr>
@@ -7688,7 +7688,7 @@
       </p:sp>
       <p:sp>
         <p:nvSpPr>
-          <p:cNvPr id="324205778" name="bg object 19"/>
+          <p:cNvPr id="1413238330" name="bg object 19"/>
           <p:cNvSpPr/>
           <p:nvPr/>
         </p:nvSpPr>
@@ -7813,7 +7813,7 @@
       </p:sp>
       <p:sp>
         <p:nvSpPr>
-          <p:cNvPr id="987631089" name="bg object 20"/>
+          <p:cNvPr id="2066236074" name="bg object 20"/>
           <p:cNvSpPr/>
           <p:nvPr/>
         </p:nvSpPr>
@@ -8055,7 +8055,7 @@
       </p:sp>
       <p:sp>
         <p:nvSpPr>
-          <p:cNvPr id="700420046" name="bg object 21"/>
+          <p:cNvPr id="2104328449" name="bg object 21"/>
           <p:cNvSpPr/>
           <p:nvPr/>
         </p:nvSpPr>
@@ -8156,7 +8156,7 @@
       </p:sp>
       <p:sp>
         <p:nvSpPr>
-          <p:cNvPr id="198953752" name="bg object 22"/>
+          <p:cNvPr id="752897325" name="bg object 22"/>
           <p:cNvSpPr/>
           <p:nvPr/>
         </p:nvSpPr>
@@ -8341,7 +8341,7 @@
       </p:sp>
       <p:sp>
         <p:nvSpPr>
-          <p:cNvPr id="1300268718" name="bg object 23"/>
+          <p:cNvPr id="2147176709" name="bg object 23"/>
           <p:cNvSpPr/>
           <p:nvPr/>
         </p:nvSpPr>
@@ -8442,7 +8442,7 @@
       </p:sp>
       <p:sp>
         <p:nvSpPr>
-          <p:cNvPr id="921891356" name="bg object 24"/>
+          <p:cNvPr id="447026930" name="bg object 24"/>
           <p:cNvSpPr/>
           <p:nvPr/>
         </p:nvSpPr>
@@ -8627,7 +8627,7 @@
       </p:sp>
       <p:pic>
         <p:nvPicPr>
-          <p:cNvPr id="855651941" name="bg object 25"/>
+          <p:cNvPr id="557738010" name="bg object 25"/>
           <p:cNvPicPr/>
           <p:nvPr/>
         </p:nvPicPr>
@@ -8647,7 +8647,7 @@
       </p:pic>
       <p:sp>
         <p:nvSpPr>
-          <p:cNvPr id="1203716438" name="bg object 26"/>
+          <p:cNvPr id="28775380" name="bg object 26"/>
           <p:cNvSpPr/>
           <p:nvPr/>
         </p:nvSpPr>
@@ -8748,7 +8748,7 @@
       </p:sp>
       <p:sp>
         <p:nvSpPr>
-          <p:cNvPr id="491904212" name="bg object 27"/>
+          <p:cNvPr id="1773994238" name="bg object 27"/>
           <p:cNvSpPr/>
           <p:nvPr/>
         </p:nvSpPr>
@@ -8930,7 +8930,7 @@
       </p:sp>
       <p:pic>
         <p:nvPicPr>
-          <p:cNvPr id="2077669278" name="bg object 28"/>
+          <p:cNvPr id="1215985766" name="bg object 28"/>
           <p:cNvPicPr/>
           <p:nvPr/>
         </p:nvPicPr>
@@ -8950,7 +8950,7 @@
       </p:pic>
       <p:pic>
         <p:nvPicPr>
-          <p:cNvPr id="1983973046" name="bg object 29"/>
+          <p:cNvPr id="1875075609" name="bg object 29"/>
           <p:cNvPicPr/>
           <p:nvPr/>
         </p:nvPicPr>
@@ -8970,7 +8970,7 @@
       </p:pic>
       <p:pic>
         <p:nvPicPr>
-          <p:cNvPr id="75815269" name="bg object 30"/>
+          <p:cNvPr id="74537411" name="bg object 30"/>
           <p:cNvPicPr/>
           <p:nvPr/>
         </p:nvPicPr>
@@ -8990,7 +8990,7 @@
       </p:pic>
       <p:pic>
         <p:nvPicPr>
-          <p:cNvPr id="1514640972" name="bg object 31"/>
+          <p:cNvPr id="649089905" name="bg object 31"/>
           <p:cNvPicPr/>
           <p:nvPr/>
         </p:nvPicPr>
@@ -9010,7 +9010,7 @@
       </p:pic>
       <p:sp>
         <p:nvSpPr>
-          <p:cNvPr id="312618105" name="Holder 2"/>
+          <p:cNvPr id="479666814" name="Holder 2"/>
           <p:cNvSpPr>
             <a:spLocks noGrp="1"/>
           </p:cNvSpPr>
@@ -9042,7 +9042,7 @@
       </p:sp>
       <p:sp>
         <p:nvSpPr>
-          <p:cNvPr id="1260864681" name="Holder 3"/>
+          <p:cNvPr id="1888820809" name="Holder 3"/>
           <p:cNvSpPr>
             <a:spLocks noGrp="1"/>
           </p:cNvSpPr>
@@ -9078,7 +9078,7 @@
       </p:sp>
       <p:sp>
         <p:nvSpPr>
-          <p:cNvPr id="1407841488" name="Holder 4"/>
+          <p:cNvPr id="1566978801" name="Holder 4"/>
           <p:cNvSpPr>
             <a:spLocks noGrp="1"/>
           </p:cNvSpPr>
@@ -9146,7 +9146,7 @@
       </p:grpSpPr>
       <p:sp>
         <p:nvSpPr>
-          <p:cNvPr id="687346590" name="Holder 2"/>
+          <p:cNvPr id="1807708029" name="Holder 2"/>
           <p:cNvSpPr>
             <a:spLocks noGrp="1"/>
           </p:cNvSpPr>
@@ -9188,7 +9188,7 @@
       </p:sp>
       <p:sp>
         <p:nvSpPr>
-          <p:cNvPr id="2085409188" name="Holder 3"/>
+          <p:cNvPr id="893135326" name="Holder 3"/>
           <p:cNvSpPr>
             <a:spLocks noGrp="1"/>
           </p:cNvSpPr>
@@ -9228,7 +9228,7 @@
       </p:sp>
       <p:sp>
         <p:nvSpPr>
-          <p:cNvPr id="194445200" name="Holder 4"/>
+          <p:cNvPr id="424681381" name="Holder 4"/>
           <p:cNvSpPr>
             <a:spLocks noGrp="1"/>
           </p:cNvSpPr>
@@ -9270,7 +9270,7 @@
       </p:sp>
       <p:sp>
         <p:nvSpPr>
-          <p:cNvPr id="1128695208" name="Holder 5"/>
+          <p:cNvPr id="459113891" name="Holder 5"/>
           <p:cNvSpPr>
             <a:spLocks noGrp="1"/>
           </p:cNvSpPr>
@@ -9316,7 +9316,7 @@
       </p:sp>
       <p:sp>
         <p:nvSpPr>
-          <p:cNvPr id="1449380908" name="Holder 6"/>
+          <p:cNvPr id="602402140" name="Holder 6"/>
           <p:cNvSpPr>
             <a:spLocks noGrp="1"/>
           </p:cNvSpPr>
@@ -9533,7 +9533,7 @@
       </p:grpSpPr>
       <p:sp>
         <p:nvSpPr>
-          <p:cNvPr id="1692492415" name="object 2"/>
+          <p:cNvPr id="209464680" name="object 2"/>
           <p:cNvSpPr txBox="1"/>
           <p:nvPr/>
         </p:nvSpPr>
@@ -9702,7 +9702,7 @@
       </p:sp>
       <p:sp>
         <p:nvSpPr>
-          <p:cNvPr id="251582246" name="object 3"/>
+          <p:cNvPr id="846934314" name="object 3"/>
           <p:cNvSpPr txBox="1"/>
           <p:nvPr/>
         </p:nvSpPr>
@@ -9747,7 +9747,7 @@
       </p:sp>
       <p:sp>
         <p:nvSpPr>
-          <p:cNvPr id="1860053782" name="object 5"/>
+          <p:cNvPr id="1962618095" name="object 5"/>
           <p:cNvSpPr txBox="1"/>
           <p:nvPr/>
         </p:nvSpPr>
@@ -9900,7 +9900,7 @@
       </p:sp>
       <p:sp>
         <p:nvSpPr>
-          <p:cNvPr id="1741117253" name="object 4"/>
+          <p:cNvPr id="559227524" name="object 4"/>
           <p:cNvSpPr txBox="1"/>
           <p:nvPr/>
         </p:nvSpPr>
@@ -9986,6 +9986,45 @@
           </a:p>
         </p:txBody>
       </p:sp>
+      <p:sp>
+        <p:nvSpPr>
+          <p:cNvPr id="1351282858" name="object 24"/>
+          <p:cNvSpPr txBox="1"/>
+          <p:nvPr/>
+        </p:nvSpPr>
+        <p:spPr bwMode="auto">
+          <a:xfrm>
+            <a:off x="100549" y="4902142"/>
+            <a:ext cx="7085172" cy="166094"/>
+          </a:xfrm>
+          <a:prstGeom prst="rect">
+            <a:avLst/>
+          </a:prstGeom>
+        </p:spPr>
+        <p:txBody>
+          <a:bodyPr vert="horz" wrap="square" lIns="0" tIns="13334" rIns="0" bIns="0" rtlCol="0">
+            <a:spAutoFit/>
+          </a:bodyPr>
+          <a:lstStyle/>
+          <a:p>
+            <a:pPr>
+              <a:defRPr/>
+            </a:pPr>
+            <a:r>
+              <a:rPr lang="it-IT" sz="1000">
+                <a:latin typeface="Libre Baskerville"/>
+                <a:ea typeface="Libre Baskerville"/>
+                <a:cs typeface="Libre Baskerville"/>
+              </a:rPr>
+              <a:t>Progetto Tecnologie Quantistiche per la Sicurezza</a:t>
+            </a:r>
+            <a:endParaRPr sz="1000">
+              <a:latin typeface="Libre Baskerville"/>
+              <a:cs typeface="Libre Baskerville"/>
+            </a:endParaRPr>
+          </a:p>
+        </p:txBody>
+      </p:sp>
     </p:spTree>
   </p:cSld>
   <p:clrMapOvr>
@@ -10021,7 +10060,7 @@
       </p:grpSpPr>
       <p:sp>
         <p:nvSpPr>
-          <p:cNvPr id="178846751" name="Rettangolo 3"/>
+          <p:cNvPr id="1431660476" name="Rettangolo 3"/>
           <p:cNvSpPr txBox="1"/>
           <p:nvPr/>
         </p:nvSpPr>
@@ -10098,7 +10137,7 @@
       </p:sp>
       <p:sp>
         <p:nvSpPr>
-          <p:cNvPr id="1666666162" name="Rettangolo 4"/>
+          <p:cNvPr id="1401558269" name="Rettangolo 4"/>
           <p:cNvSpPr txBox="1"/>
           <p:nvPr/>
         </p:nvSpPr>
@@ -10186,7 +10225,7 @@
       </p:sp>
       <p:sp>
         <p:nvSpPr>
-          <p:cNvPr id="1315880241" name="Rettangolo 5"/>
+          <p:cNvPr id="922050630" name="Rettangolo 5"/>
           <p:cNvSpPr txBox="1"/>
           <p:nvPr/>
         </p:nvSpPr>
@@ -10263,7 +10302,7 @@
       </p:sp>
       <p:sp>
         <p:nvSpPr>
-          <p:cNvPr id="759450444" name="object 2" descr="$PPTXTitle"/>
+          <p:cNvPr id="1331428081" name="object 2" descr="$PPTXTitle"/>
           <p:cNvSpPr txBox="1">
             <a:spLocks noGrp="1"/>
           </p:cNvSpPr>
@@ -10315,7 +10354,7 @@
       </p:sp>
       <p:sp>
         <p:nvSpPr>
-          <p:cNvPr id="133441529" name="object 24"/>
+          <p:cNvPr id="469346613" name="object 24"/>
           <p:cNvSpPr txBox="1"/>
           <p:nvPr/>
         </p:nvSpPr>
@@ -10387,7 +10426,7 @@
       </p:grpSpPr>
       <p:pic>
         <p:nvPicPr>
-          <p:cNvPr id="1556075904" name="object 11"/>
+          <p:cNvPr id="1433233415" name="object 11"/>
           <p:cNvPicPr/>
           <p:nvPr/>
         </p:nvPicPr>
@@ -10407,7 +10446,7 @@
       </p:pic>
       <p:grpSp>
         <p:nvGrpSpPr>
-          <p:cNvPr id="947560211" name="object 2"/>
+          <p:cNvPr id="719957573" name="object 2"/>
           <p:cNvGrpSpPr/>
           <p:nvPr/>
         </p:nvGrpSpPr>
@@ -11121,7 +11160,7 @@
       </p:grpSp>
       <p:grpSp>
         <p:nvGrpSpPr>
-          <p:cNvPr id="742635122" name="object 13"/>
+          <p:cNvPr id="188243667" name="object 13"/>
           <p:cNvGrpSpPr/>
           <p:nvPr/>
         </p:nvGrpSpPr>
@@ -11176,7 +11215,7 @@
       </p:grpSp>
       <p:pic>
         <p:nvPicPr>
-          <p:cNvPr id="1667943203" name="object 12"/>
+          <p:cNvPr id="1487885985" name="object 12"/>
           <p:cNvPicPr/>
           <p:nvPr/>
         </p:nvPicPr>
@@ -11196,7 +11235,7 @@
       </p:pic>
       <p:sp>
         <p:nvSpPr>
-          <p:cNvPr id="1739982664" name="object 16"/>
+          <p:cNvPr id="174210357" name="object 16"/>
           <p:cNvSpPr txBox="1"/>
           <p:nvPr/>
         </p:nvSpPr>
@@ -11363,7 +11402,7 @@
       </p:sp>
       <p:sp>
         <p:nvSpPr>
-          <p:cNvPr id="376563204" name="Rettangolo 16"/>
+          <p:cNvPr id="1885809748" name="Rettangolo 16"/>
           <p:cNvSpPr txBox="1"/>
           <p:nvPr/>
         </p:nvSpPr>
@@ -11435,7 +11474,7 @@
       </p:grpSpPr>
       <p:sp>
         <p:nvSpPr>
-          <p:cNvPr id="1806702393" name="object 2" descr="$PPTXTitle"/>
+          <p:cNvPr id="482977355" name="object 2" descr="$PPTXTitle"/>
           <p:cNvSpPr txBox="1">
             <a:spLocks noGrp="1"/>
           </p:cNvSpPr>
@@ -11484,7 +11523,7 @@
       </p:sp>
       <p:sp>
         <p:nvSpPr>
-          <p:cNvPr id="1639394173" name="object 24"/>
+          <p:cNvPr id="1410650258" name="object 24"/>
           <p:cNvSpPr txBox="1"/>
           <p:nvPr/>
         </p:nvSpPr>
@@ -11523,7 +11562,7 @@
       </p:sp>
       <p:sp>
         <p:nvSpPr>
-          <p:cNvPr id="1953966034" name="Rettangolo 3"/>
+          <p:cNvPr id="747520999" name="Rettangolo 3"/>
           <p:cNvSpPr txBox="1"/>
           <p:nvPr/>
         </p:nvSpPr>
@@ -11666,7 +11705,7 @@
       </p:sp>
       <p:sp>
         <p:nvSpPr>
-          <p:cNvPr id="587319082" name="Rettangolo 4"/>
+          <p:cNvPr id="2050648580" name="Rettangolo 4"/>
           <p:cNvSpPr txBox="1"/>
           <p:nvPr/>
         </p:nvSpPr>
@@ -11905,7 +11944,7 @@
       </p:grpSpPr>
       <p:grpSp>
         <p:nvGrpSpPr>
-          <p:cNvPr id="1330005521" name="object 2"/>
+          <p:cNvPr id="920867198" name="object 2"/>
           <p:cNvGrpSpPr/>
           <p:nvPr/>
         </p:nvGrpSpPr>
@@ -13516,7 +13555,7 @@
       </p:grpSp>
       <p:pic>
         <p:nvPicPr>
-          <p:cNvPr id="1083574191" name="object 15"/>
+          <p:cNvPr id="1942676966" name="object 15"/>
           <p:cNvPicPr/>
           <p:nvPr/>
         </p:nvPicPr>
@@ -13536,7 +13575,7 @@
       </p:pic>
       <p:grpSp>
         <p:nvGrpSpPr>
-          <p:cNvPr id="284913040" name="object 16"/>
+          <p:cNvPr id="1146571755" name="object 16"/>
           <p:cNvGrpSpPr/>
           <p:nvPr/>
         </p:nvGrpSpPr>
@@ -13650,7 +13689,7 @@
       </p:grpSp>
       <p:sp>
         <p:nvSpPr>
-          <p:cNvPr id="1437887462" name="Rettangolo 31"/>
+          <p:cNvPr id="113226426" name="Rettangolo 31"/>
           <p:cNvSpPr txBox="1"/>
           <p:nvPr/>
         </p:nvSpPr>
@@ -14072,7 +14111,7 @@
       </p:sp>
       <p:sp>
         <p:nvSpPr>
-          <p:cNvPr id="1822223053" name="object 2" descr="$PPTXTitle"/>
+          <p:cNvPr id="977440713" name="object 2" descr="$PPTXTitle"/>
           <p:cNvSpPr txBox="1">
             <a:spLocks noGrp="1"/>
           </p:cNvSpPr>
@@ -14082,8 +14121,8 @@
         </p:nvSpPr>
         <p:spPr bwMode="auto">
           <a:xfrm flipH="0" flipV="0">
-            <a:off x="3316255" y="216720"/>
-            <a:ext cx="5699954" cy="905486"/>
+            <a:off x="3316255" y="216719"/>
+            <a:ext cx="5699953" cy="905486"/>
           </a:xfrm>
           <a:prstGeom prst="rect">
             <a:avLst/>
@@ -14121,7 +14160,7 @@
       </p:sp>
       <p:sp>
         <p:nvSpPr>
-          <p:cNvPr id="521944089" name="object 24"/>
+          <p:cNvPr id="1557634544" name="object 24"/>
           <p:cNvSpPr txBox="1"/>
           <p:nvPr/>
         </p:nvSpPr>
@@ -14193,7 +14232,7 @@
       </p:grpSpPr>
       <p:pic>
         <p:nvPicPr>
-          <p:cNvPr id="704828669" name="Immagine 2"/>
+          <p:cNvPr id="991398194" name="Immagine 2"/>
           <p:cNvPicPr>
             <a:picLocks noChangeAspect="1"/>
           </p:cNvPicPr>
@@ -14215,7 +14254,7 @@
       </p:pic>
       <p:sp>
         <p:nvSpPr>
-          <p:cNvPr id="1931807989" name="object 24"/>
+          <p:cNvPr id="871587207" name="object 24"/>
           <p:cNvSpPr txBox="1"/>
           <p:nvPr/>
         </p:nvSpPr>
@@ -14287,7 +14326,7 @@
       </p:grpSpPr>
       <p:sp>
         <p:nvSpPr>
-          <p:cNvPr id="739227512" name="object 2" descr="$PPTXTitle"/>
+          <p:cNvPr id="1643529314" name="object 2" descr="$PPTXTitle"/>
           <p:cNvSpPr txBox="1">
             <a:spLocks noGrp="1"/>
           </p:cNvSpPr>
@@ -14336,7 +14375,7 @@
       </p:sp>
       <p:sp>
         <p:nvSpPr>
-          <p:cNvPr id="1982793998" name="Rettangolo 3"/>
+          <p:cNvPr id="1012470029" name="Rettangolo 3"/>
           <p:cNvSpPr txBox="1"/>
           <p:nvPr/>
         </p:nvSpPr>
@@ -14413,7 +14452,7 @@
       </p:sp>
       <p:sp>
         <p:nvSpPr>
-          <p:cNvPr id="1452655075" name="Rettangolo 4"/>
+          <p:cNvPr id="1504339188" name="Rettangolo 4"/>
           <p:cNvSpPr txBox="1"/>
           <p:nvPr/>
         </p:nvSpPr>
@@ -14515,7 +14554,7 @@
       </p:sp>
       <p:sp>
         <p:nvSpPr>
-          <p:cNvPr id="1928047643" name="Rettangolo 5"/>
+          <p:cNvPr id="2090852701" name="Rettangolo 5"/>
           <p:cNvSpPr txBox="1"/>
           <p:nvPr/>
         </p:nvSpPr>
@@ -14592,7 +14631,7 @@
       </p:sp>
       <p:sp>
         <p:nvSpPr>
-          <p:cNvPr id="1813149016" name="object 24"/>
+          <p:cNvPr id="1942712502" name="object 24"/>
           <p:cNvSpPr txBox="1"/>
           <p:nvPr/>
         </p:nvSpPr>
@@ -14664,15 +14703,15 @@
       </p:grpSpPr>
       <p:grpSp>
         <p:nvGrpSpPr>
-          <p:cNvPr id="2083795713" name="object 2"/>
+          <p:cNvPr id="304361332" name="object 2"/>
           <p:cNvGrpSpPr/>
           <p:nvPr/>
         </p:nvGrpSpPr>
         <p:grpSpPr bwMode="auto">
           <a:xfrm>
-            <a:off x="-4761" y="60387"/>
+            <a:off x="-4761" y="60386"/>
             <a:ext cx="3462019" cy="1482089"/>
-            <a:chOff x="-4761" y="60387"/>
+            <a:chOff x="-4761" y="60386"/>
             <a:chExt cx="3462019" cy="1482089"/>
           </a:xfrm>
         </p:grpSpPr>
@@ -15186,7 +15225,7 @@
           <p:spPr bwMode="auto">
             <a:xfrm>
               <a:off x="576299" y="1037208"/>
-              <a:ext cx="427989" cy="427354"/>
+              <a:ext cx="427989" cy="427353"/>
             </a:xfrm>
             <a:custGeom>
               <a:avLst/>
@@ -16275,7 +16314,7 @@
       </p:grpSp>
       <p:pic>
         <p:nvPicPr>
-          <p:cNvPr id="110561122" name="object 15"/>
+          <p:cNvPr id="49191416" name="object 15"/>
           <p:cNvPicPr/>
           <p:nvPr/>
         </p:nvPicPr>
@@ -16295,16 +16334,16 @@
       </p:pic>
       <p:grpSp>
         <p:nvGrpSpPr>
-          <p:cNvPr id="2101895318" name="object 16"/>
+          <p:cNvPr id="2084672107" name="object 16"/>
           <p:cNvGrpSpPr/>
           <p:nvPr/>
         </p:nvGrpSpPr>
         <p:grpSpPr bwMode="auto">
           <a:xfrm>
             <a:off x="0" y="4733568"/>
-            <a:ext cx="9144000" cy="410208"/>
+            <a:ext cx="9144000" cy="410207"/>
             <a:chOff x="0" y="4733568"/>
-            <a:chExt cx="9144000" cy="410208"/>
+            <a:chExt cx="9144000" cy="410207"/>
           </a:xfrm>
         </p:grpSpPr>
         <p:sp>
@@ -16409,7 +16448,7 @@
       </p:grpSp>
       <p:sp>
         <p:nvSpPr>
-          <p:cNvPr id="257061878" name="Rettangolo 31"/>
+          <p:cNvPr id="885270966" name="Rettangolo 31"/>
           <p:cNvSpPr txBox="1"/>
           <p:nvPr/>
         </p:nvSpPr>
@@ -16649,7 +16688,7 @@
       </p:sp>
       <p:sp>
         <p:nvSpPr>
-          <p:cNvPr id="176845009" name="object 2" descr="$PPTXTitle"/>
+          <p:cNvPr id="290616579" name="object 2" descr="$PPTXTitle"/>
           <p:cNvSpPr txBox="1">
             <a:spLocks noGrp="1"/>
           </p:cNvSpPr>
@@ -16659,7 +16698,7 @@
         </p:nvSpPr>
         <p:spPr bwMode="auto">
           <a:xfrm flipH="0" flipV="0">
-            <a:off x="2471597" y="318513"/>
+            <a:off x="2471596" y="318513"/>
             <a:ext cx="6544612" cy="905486"/>
           </a:xfrm>
           <a:prstGeom prst="rect">
@@ -16701,7 +16740,7 @@
       </p:sp>
       <p:sp>
         <p:nvSpPr>
-          <p:cNvPr id="1882467981" name="object 24"/>
+          <p:cNvPr id="977895906" name="object 24"/>
           <p:cNvSpPr txBox="1"/>
           <p:nvPr/>
         </p:nvSpPr>
@@ -16773,15 +16812,15 @@
       </p:grpSpPr>
       <p:grpSp>
         <p:nvGrpSpPr>
-          <p:cNvPr id="1682988030" name="object 2"/>
+          <p:cNvPr id="1156569186" name="object 2"/>
           <p:cNvGrpSpPr/>
           <p:nvPr/>
         </p:nvGrpSpPr>
         <p:grpSpPr bwMode="auto">
           <a:xfrm>
-            <a:off x="-4761" y="60387"/>
+            <a:off x="-4761" y="60386"/>
             <a:ext cx="3462019" cy="1482089"/>
-            <a:chOff x="-4761" y="60387"/>
+            <a:chOff x="-4761" y="60386"/>
             <a:chExt cx="3462019" cy="1482089"/>
           </a:xfrm>
         </p:grpSpPr>
@@ -17295,7 +17334,7 @@
           <p:spPr bwMode="auto">
             <a:xfrm>
               <a:off x="576299" y="1037208"/>
-              <a:ext cx="427989" cy="427354"/>
+              <a:ext cx="427989" cy="427353"/>
             </a:xfrm>
             <a:custGeom>
               <a:avLst/>
@@ -18384,7 +18423,7 @@
       </p:grpSp>
       <p:pic>
         <p:nvPicPr>
-          <p:cNvPr id="1295293871" name="object 15"/>
+          <p:cNvPr id="170118142" name="object 15"/>
           <p:cNvPicPr/>
           <p:nvPr/>
         </p:nvPicPr>
@@ -18404,16 +18443,16 @@
       </p:pic>
       <p:grpSp>
         <p:nvGrpSpPr>
-          <p:cNvPr id="1171857771" name="object 16"/>
+          <p:cNvPr id="1086217524" name="object 16"/>
           <p:cNvGrpSpPr/>
           <p:nvPr/>
         </p:nvGrpSpPr>
         <p:grpSpPr bwMode="auto">
           <a:xfrm>
             <a:off x="0" y="4733568"/>
-            <a:ext cx="9144000" cy="410208"/>
+            <a:ext cx="9144000" cy="410207"/>
             <a:chOff x="0" y="4733568"/>
-            <a:chExt cx="9144000" cy="410208"/>
+            <a:chExt cx="9144000" cy="410207"/>
           </a:xfrm>
         </p:grpSpPr>
         <p:sp>
@@ -18518,7 +18557,7 @@
       </p:grpSp>
       <p:sp>
         <p:nvSpPr>
-          <p:cNvPr id="1854025981" name="Rettangolo 31"/>
+          <p:cNvPr id="1448002900" name="Rettangolo 31"/>
           <p:cNvSpPr txBox="1"/>
           <p:nvPr/>
         </p:nvSpPr>
@@ -18816,7 +18855,7 @@
       </p:sp>
       <p:sp>
         <p:nvSpPr>
-          <p:cNvPr id="1216202003" name="object 2" descr="$PPTXTitle"/>
+          <p:cNvPr id="1869779097" name="object 2" descr="$PPTXTitle"/>
           <p:cNvSpPr txBox="1">
             <a:spLocks noGrp="1"/>
           </p:cNvSpPr>
@@ -18868,7 +18907,7 @@
       </p:sp>
       <p:sp>
         <p:nvSpPr>
-          <p:cNvPr id="2036249810" name="object 24"/>
+          <p:cNvPr id="422086600" name="object 24"/>
           <p:cNvSpPr txBox="1"/>
           <p:nvPr/>
         </p:nvSpPr>
@@ -18940,15 +18979,15 @@
       </p:grpSpPr>
       <p:grpSp>
         <p:nvGrpSpPr>
-          <p:cNvPr id="1751603918" name="object 2"/>
+          <p:cNvPr id="882752254" name="object 2"/>
           <p:cNvGrpSpPr/>
           <p:nvPr/>
         </p:nvGrpSpPr>
         <p:grpSpPr bwMode="auto">
           <a:xfrm>
-            <a:off x="-4761" y="60387"/>
+            <a:off x="-4761" y="60386"/>
             <a:ext cx="3462019" cy="1482089"/>
-            <a:chOff x="-4761" y="60387"/>
+            <a:chOff x="-4761" y="60386"/>
             <a:chExt cx="3462019" cy="1482089"/>
           </a:xfrm>
         </p:grpSpPr>
@@ -19462,7 +19501,7 @@
           <p:spPr bwMode="auto">
             <a:xfrm>
               <a:off x="576299" y="1037208"/>
-              <a:ext cx="427989" cy="427354"/>
+              <a:ext cx="427989" cy="427353"/>
             </a:xfrm>
             <a:custGeom>
               <a:avLst/>
@@ -20551,7 +20590,7 @@
       </p:grpSp>
       <p:pic>
         <p:nvPicPr>
-          <p:cNvPr id="1182697148" name="object 15"/>
+          <p:cNvPr id="1865920692" name="object 15"/>
           <p:cNvPicPr/>
           <p:nvPr/>
         </p:nvPicPr>
@@ -20571,16 +20610,16 @@
       </p:pic>
       <p:grpSp>
         <p:nvGrpSpPr>
-          <p:cNvPr id="1709263184" name="object 16"/>
+          <p:cNvPr id="1787825" name="object 16"/>
           <p:cNvGrpSpPr/>
           <p:nvPr/>
         </p:nvGrpSpPr>
         <p:grpSpPr bwMode="auto">
           <a:xfrm>
             <a:off x="0" y="4733568"/>
-            <a:ext cx="9144000" cy="410208"/>
+            <a:ext cx="9144000" cy="410207"/>
             <a:chOff x="0" y="4733568"/>
-            <a:chExt cx="9144000" cy="410208"/>
+            <a:chExt cx="9144000" cy="410207"/>
           </a:xfrm>
         </p:grpSpPr>
         <p:sp>
@@ -20685,7 +20724,7 @@
       </p:grpSp>
       <p:sp>
         <p:nvSpPr>
-          <p:cNvPr id="1273014484" name="Rettangolo 31"/>
+          <p:cNvPr id="778772810" name="Rettangolo 31"/>
           <p:cNvSpPr txBox="1"/>
           <p:nvPr/>
         </p:nvSpPr>
@@ -20890,7 +20929,7 @@
       </p:sp>
       <p:sp>
         <p:nvSpPr>
-          <p:cNvPr id="99893747" name="object 2" descr="$PPTXTitle"/>
+          <p:cNvPr id="145607852" name="object 2" descr="$PPTXTitle"/>
           <p:cNvSpPr txBox="1">
             <a:spLocks noGrp="1"/>
           </p:cNvSpPr>
@@ -20900,7 +20939,7 @@
         </p:nvSpPr>
         <p:spPr bwMode="auto">
           <a:xfrm flipH="0" flipV="0">
-            <a:off x="2719693" y="245804"/>
+            <a:off x="2719692" y="245803"/>
             <a:ext cx="6548212" cy="905486"/>
           </a:xfrm>
           <a:prstGeom prst="rect">
@@ -20942,7 +20981,7 @@
       </p:sp>
       <p:sp>
         <p:nvSpPr>
-          <p:cNvPr id="930656270" name="object 24"/>
+          <p:cNvPr id="902591038" name="object 24"/>
           <p:cNvSpPr txBox="1"/>
           <p:nvPr/>
         </p:nvSpPr>
@@ -21014,15 +21053,15 @@
       </p:grpSpPr>
       <p:grpSp>
         <p:nvGrpSpPr>
-          <p:cNvPr id="230465629" name="object 2"/>
+          <p:cNvPr id="732625727" name="object 2"/>
           <p:cNvGrpSpPr/>
           <p:nvPr/>
         </p:nvGrpSpPr>
         <p:grpSpPr bwMode="auto">
           <a:xfrm>
-            <a:off x="-4761" y="60387"/>
+            <a:off x="-4761" y="60386"/>
             <a:ext cx="3462019" cy="1482089"/>
-            <a:chOff x="-4761" y="60387"/>
+            <a:chOff x="-4761" y="60386"/>
             <a:chExt cx="3462019" cy="1482089"/>
           </a:xfrm>
         </p:grpSpPr>
@@ -21536,7 +21575,7 @@
           <p:spPr bwMode="auto">
             <a:xfrm>
               <a:off x="576299" y="1037208"/>
-              <a:ext cx="427989" cy="427354"/>
+              <a:ext cx="427989" cy="427353"/>
             </a:xfrm>
             <a:custGeom>
               <a:avLst/>
@@ -22625,7 +22664,7 @@
       </p:grpSp>
       <p:pic>
         <p:nvPicPr>
-          <p:cNvPr id="1085468943" name="object 15"/>
+          <p:cNvPr id="926172767" name="object 15"/>
           <p:cNvPicPr/>
           <p:nvPr/>
         </p:nvPicPr>
@@ -22645,16 +22684,16 @@
       </p:pic>
       <p:grpSp>
         <p:nvGrpSpPr>
-          <p:cNvPr id="1869790375" name="object 16"/>
+          <p:cNvPr id="474072830" name="object 16"/>
           <p:cNvGrpSpPr/>
           <p:nvPr/>
         </p:nvGrpSpPr>
         <p:grpSpPr bwMode="auto">
           <a:xfrm>
             <a:off x="0" y="4733568"/>
-            <a:ext cx="9144000" cy="410208"/>
+            <a:ext cx="9144000" cy="410207"/>
             <a:chOff x="0" y="4733568"/>
-            <a:chExt cx="9144000" cy="410208"/>
+            <a:chExt cx="9144000" cy="410207"/>
           </a:xfrm>
         </p:grpSpPr>
         <p:sp>
@@ -22759,7 +22798,7 @@
       </p:grpSp>
       <p:sp>
         <p:nvSpPr>
-          <p:cNvPr id="1481783841" name="Rettangolo 31"/>
+          <p:cNvPr id="1034528232" name="Rettangolo 31"/>
           <p:cNvSpPr txBox="1"/>
           <p:nvPr/>
         </p:nvSpPr>
@@ -23159,7 +23198,7 @@
       </p:sp>
       <p:sp>
         <p:nvSpPr>
-          <p:cNvPr id="858654089" name="Rettangolo 21"/>
+          <p:cNvPr id="331303397" name="Rettangolo 21"/>
           <p:cNvSpPr txBox="1"/>
           <p:nvPr/>
         </p:nvSpPr>
@@ -23284,7 +23323,7 @@
       </p:sp>
       <p:sp>
         <p:nvSpPr>
-          <p:cNvPr id="872685756" name="object 2" descr="$PPTXTitle"/>
+          <p:cNvPr id="1852665218" name="object 2" descr="$PPTXTitle"/>
           <p:cNvSpPr txBox="1">
             <a:spLocks noGrp="1"/>
           </p:cNvSpPr>
@@ -23336,7 +23375,7 @@
       </p:sp>
       <p:sp>
         <p:nvSpPr>
-          <p:cNvPr id="1468154950" name="object 24"/>
+          <p:cNvPr id="183629512" name="object 24"/>
           <p:cNvSpPr txBox="1"/>
           <p:nvPr/>
         </p:nvSpPr>
